--- a/Personal Loan Classifier.pptx
+++ b/Personal Loan Classifier.pptx
@@ -5118,8 +5118,8 @@
         </p:blipFill>
         <p:spPr bwMode="auto">
           <a:xfrm>
-            <a:off x="3806552" y="1530541"/>
-            <a:ext cx="8246988" cy="4424310"/>
+            <a:off x="151757" y="1397682"/>
+            <a:ext cx="5944243" cy="3188943"/>
           </a:xfrm>
           <a:prstGeom prst="rect">
             <a:avLst/>
@@ -5289,8 +5289,8 @@
         </p:nvSpPr>
         <p:spPr>
           <a:xfrm>
-            <a:off x="321091" y="2049611"/>
-            <a:ext cx="3302830" cy="3539430"/>
+            <a:off x="277580" y="4726329"/>
+            <a:ext cx="3759527" cy="2308324"/>
           </a:xfrm>
           <a:prstGeom prst="rect">
             <a:avLst/>
@@ -5304,52 +5304,168 @@
           <a:lstStyle/>
           <a:p>
             <a:r>
-              <a:rPr lang="en-US" sz="1600" dirty="0"/>
+              <a:rPr lang="en-US" sz="1200" dirty="0"/>
               <a:t>The model predicts a </a:t>
             </a:r>
             <a:r>
-              <a:rPr lang="en-US" sz="1600" b="1" dirty="0"/>
+              <a:rPr lang="en-US" sz="1200" b="1" dirty="0"/>
               <a:t>94.8% probability</a:t>
             </a:r>
             <a:r>
-              <a:rPr lang="en-US" sz="1600" dirty="0"/>
+              <a:rPr lang="en-US" sz="1200" dirty="0"/>
               <a:t> (using these specific features) of the customer taking the loan, starting from a base value of 50.1%.</a:t>
             </a:r>
           </a:p>
           <a:p>
-            <a:endParaRPr lang="en-US" sz="1600" dirty="0"/>
-          </a:p>
-          <a:p>
-            <a:r>
-              <a:rPr lang="en-US" sz="1600" dirty="0"/>
+            <a:endParaRPr lang="en-US" sz="1200" dirty="0"/>
+          </a:p>
+          <a:p>
+            <a:r>
+              <a:rPr lang="en-US" sz="1200" dirty="0"/>
               <a:t>This high prediction is mainly driven by </a:t>
             </a:r>
             <a:r>
-              <a:rPr lang="en-US" sz="1600" b="1" dirty="0"/>
+              <a:rPr lang="en-US" sz="1200" b="1" dirty="0"/>
               <a:t>high income, strong credit card spending, and education level</a:t>
             </a:r>
             <a:r>
-              <a:rPr lang="en-US" sz="1600" dirty="0"/>
+              <a:rPr lang="en-US" sz="1200" dirty="0"/>
               <a:t>.</a:t>
             </a:r>
           </a:p>
           <a:p>
-            <a:endParaRPr lang="en-US" sz="1600" dirty="0"/>
-          </a:p>
-          <a:p>
-            <a:r>
-              <a:rPr lang="en-US" sz="1600" dirty="0"/>
+            <a:endParaRPr lang="en-US" sz="1200" dirty="0"/>
+          </a:p>
+          <a:p>
+            <a:r>
+              <a:rPr lang="en-US" sz="1200" dirty="0"/>
               <a:t>Other factors like age, mortgage, and CD account have </a:t>
             </a:r>
             <a:r>
-              <a:rPr lang="en-US" sz="1600" b="1" dirty="0"/>
+              <a:rPr lang="en-US" sz="1200" b="1" dirty="0"/>
               <a:t>minimal impact</a:t>
             </a:r>
             <a:r>
-              <a:rPr lang="en-US" sz="1600" dirty="0"/>
+              <a:rPr lang="en-US" sz="1200" dirty="0"/>
               <a:t>, so they do not significantly affect the outcome.</a:t>
             </a:r>
-            <a:endParaRPr lang="en-IN" sz="1600" dirty="0"/>
+          </a:p>
+          <a:p>
+            <a:endParaRPr lang="en-US" sz="1200" dirty="0"/>
+          </a:p>
+          <a:p>
+            <a:r>
+              <a:rPr lang="en-US" sz="1200" dirty="0"/>
+              <a:t>(This is for a specific example)</a:t>
+            </a:r>
+          </a:p>
+        </p:txBody>
+      </p:sp>
+      <p:pic>
+        <p:nvPicPr>
+          <p:cNvPr id="1026" name="Picture 2">
+            <a:extLst>
+              <a:ext uri="{FF2B5EF4-FFF2-40B4-BE49-F238E27FC236}">
+                <a16:creationId xmlns:a16="http://schemas.microsoft.com/office/drawing/2014/main" id="{34BFF2AB-DD11-6E70-D7C2-F380D01B2F81}"/>
+              </a:ext>
+            </a:extLst>
+          </p:cNvPr>
+          <p:cNvPicPr>
+            <a:picLocks noChangeAspect="1" noChangeArrowheads="1"/>
+          </p:cNvPicPr>
+          <p:nvPr/>
+        </p:nvPicPr>
+        <p:blipFill>
+          <a:blip r:embed="rId3">
+            <a:extLst>
+              <a:ext uri="{28A0092B-C50C-407E-A947-70E740481C1C}">
+                <a14:useLocalDpi xmlns:a14="http://schemas.microsoft.com/office/drawing/2010/main" val="0"/>
+              </a:ext>
+            </a:extLst>
+          </a:blip>
+          <a:srcRect/>
+          <a:stretch>
+            <a:fillRect/>
+          </a:stretch>
+        </p:blipFill>
+        <p:spPr bwMode="auto">
+          <a:xfrm>
+            <a:off x="6247757" y="1530961"/>
+            <a:ext cx="5685357" cy="3195368"/>
+          </a:xfrm>
+          <a:prstGeom prst="rect">
+            <a:avLst/>
+          </a:prstGeom>
+          <a:noFill/>
+          <a:extLst>
+            <a:ext uri="{909E8E84-426E-40DD-AFC4-6F175D3DCCD1}">
+              <a14:hiddenFill xmlns:a14="http://schemas.microsoft.com/office/drawing/2010/main">
+                <a:solidFill>
+                  <a:srgbClr val="FFFFFF"/>
+                </a:solidFill>
+              </a14:hiddenFill>
+            </a:ext>
+          </a:extLst>
+        </p:spPr>
+      </p:pic>
+      <p:sp>
+        <p:nvSpPr>
+          <p:cNvPr id="3" name="TextBox 2">
+            <a:extLst>
+              <a:ext uri="{FF2B5EF4-FFF2-40B4-BE49-F238E27FC236}">
+                <a16:creationId xmlns:a16="http://schemas.microsoft.com/office/drawing/2014/main" id="{4D0527D4-9C76-91DD-EAE2-0B71FD5B83EA}"/>
+              </a:ext>
+            </a:extLst>
+          </p:cNvPr>
+          <p:cNvSpPr txBox="1"/>
+          <p:nvPr/>
+        </p:nvSpPr>
+        <p:spPr>
+          <a:xfrm>
+            <a:off x="6803923" y="4876777"/>
+            <a:ext cx="4149213" cy="1569660"/>
+          </a:xfrm>
+          <a:prstGeom prst="rect">
+            <a:avLst/>
+          </a:prstGeom>
+          <a:noFill/>
+        </p:spPr>
+        <p:txBody>
+          <a:bodyPr wrap="square" rtlCol="0">
+            <a:spAutoFit/>
+          </a:bodyPr>
+          <a:lstStyle/>
+          <a:p>
+            <a:r>
+              <a:rPr lang="en-IN" sz="1200" dirty="0"/>
+              <a:t>SHAP value bar plot of the model. </a:t>
+            </a:r>
+          </a:p>
+          <a:p>
+            <a:endParaRPr lang="en-IN" sz="1200" dirty="0"/>
+          </a:p>
+          <a:p>
+            <a:r>
+              <a:rPr lang="en-IN" sz="1200" dirty="0"/>
+              <a:t>From this, we can see the model relies heavily on Income, </a:t>
+            </a:r>
+            <a:r>
+              <a:rPr lang="en-IN" sz="1200" dirty="0" err="1"/>
+              <a:t>CCAvg</a:t>
+            </a:r>
+            <a:r>
+              <a:rPr lang="en-IN" sz="1200" dirty="0"/>
+              <a:t>, Education, while other columns have minimal impact. </a:t>
+            </a:r>
+          </a:p>
+          <a:p>
+            <a:endParaRPr lang="en-IN" sz="1200" dirty="0"/>
+          </a:p>
+          <a:p>
+            <a:r>
+              <a:rPr lang="en-IN" sz="1200" dirty="0"/>
+              <a:t>Seeing the graph, we can also see that Age input feature is of no use, and hence can be removed from the model.</a:t>
+            </a:r>
           </a:p>
         </p:txBody>
       </p:sp>
